--- a/assets/pptx/catalog-166.pptx
+++ b/assets/pptx/catalog-166.pptx
@@ -3265,7 +3265,7 @@
                 <a:ea typeface="Ebrima"/>
                 <a:cs typeface="Ebrima"/>
               </a:rPr>
-              <a:t>እግዚአብሔር እንዴት ድንቅ ነው (3x)</a:t>
+              <a:t>እግዚአብሔር እንዴት ድንቅ ነው 3x</a:t>
             </a:r>
           </a:p>
           <a:p>
@@ -3301,7 +3301,7 @@
                 <a:ea typeface="Ebrima"/>
                 <a:cs typeface="Ebrima"/>
               </a:rPr>
-              <a:t>እግዚአብሔር እንዴት ድንቅ ነው (3x)</a:t>
+              <a:t>እግዚአብሔር እንዴት ድንቅ ነው 3x</a:t>
             </a:r>
           </a:p>
         </p:txBody>
@@ -3404,7 +3404,7 @@
                 <a:ea typeface="Ebrima"/>
                 <a:cs typeface="Ebrima"/>
               </a:rPr>
-              <a:t>ኧረ እንዴት አመስግኜው ልርካ (4x)</a:t>
+              <a:t>ኧረ እንዴት አመስግኜው ልርካ 4x</a:t>
             </a:r>
           </a:p>
         </p:txBody>
@@ -3525,7 +3525,7 @@
                 <a:ea typeface="Ebrima"/>
                 <a:cs typeface="Ebrima"/>
               </a:rPr>
-              <a:t>በርሱ አይደለም ወይ እስከ አሁኗ ድረስ ያለሁት (2x)</a:t>
+              <a:t>በርሱ አይደለም ወይ እስከ አሁኗ ድረስ ያለሁት 2x</a:t>
             </a:r>
           </a:p>
         </p:txBody>
@@ -3646,7 +3646,7 @@
                 <a:ea typeface="Ebrima"/>
                 <a:cs typeface="Ebrima"/>
               </a:rPr>
-              <a:t>እሩህሩህነትህ አቤት አቤት አቤት (2x)</a:t>
+              <a:t>እሩህሩህነትህ አቤት አቤት አቤት 2x</a:t>
             </a:r>
           </a:p>
         </p:txBody>
@@ -3767,7 +3767,7 @@
                 <a:ea typeface="Ebrima"/>
                 <a:cs typeface="Ebrima"/>
               </a:rPr>
-              <a:t>እንደእግዚአብሔር ያለ የለም ብዬ ልደምድመው (2x)</a:t>
+              <a:t>እንደእግዚአብሔር ያለ የለም ብዬ ልደምድመው 2x</a:t>
             </a:r>
           </a:p>
         </p:txBody>
@@ -3888,7 +3888,7 @@
                 <a:ea typeface="Ebrima"/>
                 <a:cs typeface="Ebrima"/>
               </a:rPr>
-              <a:t>ቢፈለግ ዘላለም አቤት አቤት አቤት (2x)</a:t>
+              <a:t>ቢፈለግ ዘላለም አቤት አቤት አቤት 2x</a:t>
             </a:r>
           </a:p>
         </p:txBody>
@@ -3991,7 +3991,7 @@
                 <a:ea typeface="Ebrima"/>
                 <a:cs typeface="Ebrima"/>
               </a:rPr>
-              <a:t>ኧረ እንዴት አመስግኜው ልርካ(4x)</a:t>
+              <a:t>ኧረ እንዴት አመስግኜው ልርካ4x</a:t>
             </a:r>
           </a:p>
         </p:txBody>
